--- a/maven_training/source_material/course_portal/downloads/army_data_orientation_v2.pptx
+++ b/maven_training/source_material/course_portal/downloads/army_data_orientation_v2.pptx
@@ -4234,7 +4234,7 @@
         <p:spPr>
           <a:xfrm>
             <a:off x="137160" y="969264"/>
-            <a:ext cx="5884164" cy="2697479"/>
+            <a:ext cx="5884164" cy="2551175"/>
           </a:xfrm>
           <a:prstGeom prst="rect">
             <a:avLst/>
@@ -4311,7 +4311,7 @@
         <p:spPr>
           <a:xfrm>
             <a:off x="228600" y="1316736"/>
-            <a:ext cx="5701283" cy="2258568"/>
+            <a:ext cx="5701283" cy="2112263"/>
           </a:xfrm>
           <a:prstGeom prst="rect">
             <a:avLst/>
@@ -4388,7 +4388,7 @@
         <p:spPr>
           <a:xfrm>
             <a:off x="6167628" y="969264"/>
-            <a:ext cx="5884164" cy="2697479"/>
+            <a:ext cx="5884164" cy="2551175"/>
           </a:xfrm>
           <a:prstGeom prst="rect">
             <a:avLst/>
@@ -4465,7 +4465,7 @@
         <p:spPr>
           <a:xfrm>
             <a:off x="6259068" y="1316736"/>
-            <a:ext cx="5701283" cy="2258568"/>
+            <a:ext cx="5701283" cy="2112263"/>
           </a:xfrm>
           <a:prstGeom prst="rect">
             <a:avLst/>
@@ -4498,7 +4498,7 @@
         </p:nvSpPr>
         <p:spPr>
           <a:xfrm>
-            <a:off x="137160" y="3813048"/>
+            <a:off x="137160" y="3666744"/>
             <a:ext cx="5884164" cy="54864"/>
           </a:xfrm>
           <a:prstGeom prst="rect">
@@ -4541,8 +4541,8 @@
         </p:nvSpPr>
         <p:spPr>
           <a:xfrm>
-            <a:off x="137160" y="3867911"/>
-            <a:ext cx="5884164" cy="2697479"/>
+            <a:off x="137160" y="3721607"/>
+            <a:ext cx="5884164" cy="2551175"/>
           </a:xfrm>
           <a:prstGeom prst="rect">
             <a:avLst/>
@@ -4584,7 +4584,7 @@
         </p:nvSpPr>
         <p:spPr>
           <a:xfrm>
-            <a:off x="228600" y="3922776"/>
+            <a:off x="228600" y="3776472"/>
             <a:ext cx="5701283" cy="256032"/>
           </a:xfrm>
           <a:prstGeom prst="rect">
@@ -4618,8 +4618,8 @@
         </p:nvSpPr>
         <p:spPr>
           <a:xfrm>
-            <a:off x="228600" y="4215384"/>
-            <a:ext cx="5701283" cy="2258568"/>
+            <a:off x="228600" y="4069080"/>
+            <a:ext cx="5701283" cy="2112263"/>
           </a:xfrm>
           <a:prstGeom prst="rect">
             <a:avLst/>
@@ -4652,7 +4652,7 @@
         </p:nvSpPr>
         <p:spPr>
           <a:xfrm>
-            <a:off x="6167628" y="3813048"/>
+            <a:off x="6167628" y="3666744"/>
             <a:ext cx="5884164" cy="54864"/>
           </a:xfrm>
           <a:prstGeom prst="rect">
@@ -4695,8 +4695,8 @@
         </p:nvSpPr>
         <p:spPr>
           <a:xfrm>
-            <a:off x="6167628" y="3867911"/>
-            <a:ext cx="5884164" cy="2697479"/>
+            <a:off x="6167628" y="3721607"/>
+            <a:ext cx="5884164" cy="2551175"/>
           </a:xfrm>
           <a:prstGeom prst="rect">
             <a:avLst/>
@@ -4738,7 +4738,7 @@
         </p:nvSpPr>
         <p:spPr>
           <a:xfrm>
-            <a:off x="6259068" y="3922776"/>
+            <a:off x="6259068" y="3776472"/>
             <a:ext cx="5701283" cy="256032"/>
           </a:xfrm>
           <a:prstGeom prst="rect">
@@ -4772,8 +4772,8 @@
         </p:nvSpPr>
         <p:spPr>
           <a:xfrm>
-            <a:off x="6259068" y="4215384"/>
-            <a:ext cx="5701283" cy="2258568"/>
+            <a:off x="6259068" y="4069080"/>
+            <a:ext cx="5701283" cy="2112263"/>
           </a:xfrm>
           <a:prstGeom prst="rect">
             <a:avLst/>
@@ -4892,8 +4892,8 @@
         </p:nvSpPr>
         <p:spPr>
           <a:xfrm>
-            <a:off x="0" y="6574536"/>
-            <a:ext cx="11140702" cy="283464"/>
+            <a:off x="0" y="6720840"/>
+            <a:ext cx="11140702" cy="137160"/>
           </a:xfrm>
           <a:prstGeom prst="rect">
             <a:avLst/>
@@ -4908,7 +4908,7 @@
           <a:p>
             <a:pPr algn="l"/>
             <a:r>
-              <a:rPr sz="800" b="0">
+              <a:rPr sz="700" b="0">
                 <a:solidFill>
                   <a:srgbClr val="18335F"/>
                 </a:solidFill>
@@ -5907,8 +5907,8 @@
         </p:nvSpPr>
         <p:spPr>
           <a:xfrm>
-            <a:off x="0" y="6574536"/>
-            <a:ext cx="11140702" cy="283464"/>
+            <a:off x="0" y="6720840"/>
+            <a:ext cx="11140702" cy="137160"/>
           </a:xfrm>
           <a:prstGeom prst="rect">
             <a:avLst/>
@@ -5923,7 +5923,7 @@
           <a:p>
             <a:pPr algn="l"/>
             <a:r>
-              <a:rPr sz="800" b="0">
+              <a:rPr sz="700" b="0">
                 <a:solidFill>
                   <a:srgbClr val="18335F"/>
                 </a:solidFill>
@@ -6965,8 +6965,8 @@
         </p:nvSpPr>
         <p:spPr>
           <a:xfrm>
-            <a:off x="0" y="6574536"/>
-            <a:ext cx="11140702" cy="283464"/>
+            <a:off x="0" y="6720840"/>
+            <a:ext cx="11140702" cy="137160"/>
           </a:xfrm>
           <a:prstGeom prst="rect">
             <a:avLst/>
@@ -6981,7 +6981,7 @@
           <a:p>
             <a:pPr algn="l"/>
             <a:r>
-              <a:rPr sz="800" b="0">
+              <a:rPr sz="700" b="0">
                 <a:solidFill>
                   <a:srgbClr val="18335F"/>
                 </a:solidFill>
@@ -8424,7 +8424,7 @@
         <p:spPr>
           <a:xfrm>
             <a:off x="137160" y="896112"/>
-            <a:ext cx="5884164" cy="5431536"/>
+            <a:ext cx="5884164" cy="5102352"/>
           </a:xfrm>
           <a:prstGeom prst="rect">
             <a:avLst/>
@@ -8467,7 +8467,7 @@
         <p:spPr>
           <a:xfrm>
             <a:off x="210311" y="950976"/>
-            <a:ext cx="5737859" cy="5358383"/>
+            <a:ext cx="5737859" cy="5029200"/>
           </a:xfrm>
           <a:prstGeom prst="rect">
             <a:avLst/>
@@ -8577,7 +8577,7 @@
         </p:nvSpPr>
         <p:spPr>
           <a:xfrm>
-            <a:off x="210311" y="6309360"/>
+            <a:off x="210311" y="6053328"/>
             <a:ext cx="5774436" cy="201168"/>
           </a:xfrm>
           <a:prstGeom prst="rect">
@@ -8689,7 +8689,7 @@
         <p:spPr>
           <a:xfrm>
             <a:off x="6167628" y="896112"/>
-            <a:ext cx="5884164" cy="5431536"/>
+            <a:ext cx="5884164" cy="5175503"/>
           </a:xfrm>
           <a:prstGeom prst="rect">
             <a:avLst/>
@@ -8732,7 +8732,7 @@
         <p:spPr>
           <a:xfrm>
             <a:off x="6240780" y="950976"/>
-            <a:ext cx="5737859" cy="5358383"/>
+            <a:ext cx="5737859" cy="5102351"/>
           </a:xfrm>
           <a:prstGeom prst="rect">
             <a:avLst/>
@@ -8853,7 +8853,7 @@
         </p:nvSpPr>
         <p:spPr>
           <a:xfrm>
-            <a:off x="6240780" y="6309360"/>
+            <a:off x="6240780" y="6053328"/>
             <a:ext cx="5774436" cy="201168"/>
           </a:xfrm>
           <a:prstGeom prst="rect">
@@ -9203,7 +9203,7 @@
         <p:spPr>
           <a:xfrm>
             <a:off x="137160" y="1152144"/>
-            <a:ext cx="3959352" cy="4773168"/>
+            <a:ext cx="3959352" cy="4242816"/>
           </a:xfrm>
           <a:prstGeom prst="rect">
             <a:avLst/>
@@ -9246,7 +9246,7 @@
         <p:spPr>
           <a:xfrm>
             <a:off x="210311" y="1207008"/>
-            <a:ext cx="3813048" cy="4700016"/>
+            <a:ext cx="3813048" cy="4169663"/>
           </a:xfrm>
           <a:prstGeom prst="rect">
             <a:avLst/>
@@ -9279,7 +9279,7 @@
         </p:nvSpPr>
         <p:spPr>
           <a:xfrm>
-            <a:off x="210311" y="5705856"/>
+            <a:off x="210311" y="5431536"/>
             <a:ext cx="3813048" cy="201168"/>
           </a:xfrm>
           <a:prstGeom prst="rect">
@@ -9391,7 +9391,7 @@
         <p:spPr>
           <a:xfrm>
             <a:off x="4114800" y="1152144"/>
-            <a:ext cx="3959352" cy="4773168"/>
+            <a:ext cx="3959352" cy="4242816"/>
           </a:xfrm>
           <a:prstGeom prst="rect">
             <a:avLst/>
@@ -9434,7 +9434,7 @@
         <p:spPr>
           <a:xfrm>
             <a:off x="4187952" y="1207008"/>
-            <a:ext cx="3813048" cy="4700016"/>
+            <a:ext cx="3813048" cy="4169663"/>
           </a:xfrm>
           <a:prstGeom prst="rect">
             <a:avLst/>
@@ -9467,7 +9467,7 @@
         </p:nvSpPr>
         <p:spPr>
           <a:xfrm>
-            <a:off x="4187952" y="5705856"/>
+            <a:off x="4187952" y="5431536"/>
             <a:ext cx="3813048" cy="201168"/>
           </a:xfrm>
           <a:prstGeom prst="rect">
@@ -9579,7 +9579,7 @@
         <p:spPr>
           <a:xfrm>
             <a:off x="8092440" y="1152144"/>
-            <a:ext cx="3959352" cy="4773168"/>
+            <a:ext cx="3959352" cy="4242816"/>
           </a:xfrm>
           <a:prstGeom prst="rect">
             <a:avLst/>
@@ -9622,7 +9622,7 @@
         <p:spPr>
           <a:xfrm>
             <a:off x="8165592" y="1207008"/>
-            <a:ext cx="3813048" cy="4700016"/>
+            <a:ext cx="3813048" cy="4169663"/>
           </a:xfrm>
           <a:prstGeom prst="rect">
             <a:avLst/>
@@ -9655,7 +9655,7 @@
         </p:nvSpPr>
         <p:spPr>
           <a:xfrm>
-            <a:off x="8165592" y="5705856"/>
+            <a:off x="8165592" y="5431536"/>
             <a:ext cx="3813048" cy="201168"/>
           </a:xfrm>
           <a:prstGeom prst="rect">
@@ -9689,7 +9689,7 @@
         </p:nvSpPr>
         <p:spPr>
           <a:xfrm>
-            <a:off x="137160" y="5980176"/>
+            <a:off x="137160" y="5705855"/>
             <a:ext cx="11914632" cy="640080"/>
           </a:xfrm>
           <a:prstGeom prst="rect">
@@ -9732,7 +9732,7 @@
         </p:nvSpPr>
         <p:spPr>
           <a:xfrm>
-            <a:off x="246888" y="6035040"/>
+            <a:off x="246888" y="5760719"/>
             <a:ext cx="11695176" cy="530352"/>
           </a:xfrm>
           <a:prstGeom prst="rect">
